--- a/Origo_admin_tutorial_swedish.pptx
+++ b/Origo_admin_tutorial_swedish.pptx
@@ -13587,10 +13587,10 @@
       </p:sp>
       <p:grpSp>
         <p:nvGrpSpPr>
-          <p:cNvPr id="8" name="Grupp 7">
-            <a:extLst>
-              <a:ext uri="{FF2B5EF4-FFF2-40B4-BE49-F238E27FC236}">
-                <a16:creationId xmlns:a16="http://schemas.microsoft.com/office/drawing/2014/main" id="{A72E2B65-2A33-DC09-EE3F-514221B0AAA3}"/>
+          <p:cNvPr id="14" name="Grupp 13">
+            <a:extLst>
+              <a:ext uri="{FF2B5EF4-FFF2-40B4-BE49-F238E27FC236}">
+                <a16:creationId xmlns:a16="http://schemas.microsoft.com/office/drawing/2014/main" id="{7DABE28E-9020-B06C-85F1-E6275EE0AD72}"/>
               </a:ext>
             </a:extLst>
           </p:cNvPr>
@@ -13605,43 +13605,219 @@
             <a:chExt cx="11748203" cy="1671394"/>
           </a:xfrm>
         </p:grpSpPr>
-        <p:pic>
-          <p:nvPicPr>
-            <p:cNvPr id="7" name="Bildobjekt 6" descr="En bild som visar linje, text, Parallell, skärmbild&#10;&#10;AI-genererat innehåll kan vara felaktigt.">
+        <p:grpSp>
+          <p:nvGrpSpPr>
+            <p:cNvPr id="10" name="Grupp 9">
               <a:extLst>
                 <a:ext uri="{FF2B5EF4-FFF2-40B4-BE49-F238E27FC236}">
-                  <a16:creationId xmlns:a16="http://schemas.microsoft.com/office/drawing/2014/main" id="{8C1A6423-65F6-A3C0-C1FA-63C5F3C8F796}"/>
+                  <a16:creationId xmlns:a16="http://schemas.microsoft.com/office/drawing/2014/main" id="{BA89C3D0-2934-4407-4EEC-F1B1DE4612A6}"/>
                 </a:ext>
               </a:extLst>
             </p:cNvPr>
-            <p:cNvPicPr>
-              <a:picLocks noChangeAspect="1"/>
-            </p:cNvPicPr>
+            <p:cNvGrpSpPr/>
             <p:nvPr/>
-          </p:nvPicPr>
-          <p:blipFill>
-            <a:blip r:embed="rId3"/>
-            <a:srcRect b="5179"/>
-            <a:stretch>
-              <a:fillRect/>
-            </a:stretch>
-          </p:blipFill>
-          <p:spPr>
+          </p:nvGrpSpPr>
+          <p:grpSpPr>
             <a:xfrm>
               <a:off x="149044" y="3965731"/>
               <a:ext cx="11748203" cy="1671394"/>
+              <a:chOff x="149044" y="3965731"/>
+              <a:chExt cx="11748203" cy="1671394"/>
             </a:xfrm>
-            <a:prstGeom prst="rect">
-              <a:avLst/>
-            </a:prstGeom>
-          </p:spPr>
-        </p:pic>
+          </p:grpSpPr>
+          <p:grpSp>
+            <p:nvGrpSpPr>
+              <p:cNvPr id="8" name="Grupp 7">
+                <a:extLst>
+                  <a:ext uri="{FF2B5EF4-FFF2-40B4-BE49-F238E27FC236}">
+                    <a16:creationId xmlns:a16="http://schemas.microsoft.com/office/drawing/2014/main" id="{A72E2B65-2A33-DC09-EE3F-514221B0AAA3}"/>
+                  </a:ext>
+                </a:extLst>
+              </p:cNvPr>
+              <p:cNvGrpSpPr/>
+              <p:nvPr/>
+            </p:nvGrpSpPr>
+            <p:grpSpPr>
+              <a:xfrm>
+                <a:off x="149044" y="3965731"/>
+                <a:ext cx="11748203" cy="1671394"/>
+                <a:chOff x="149044" y="3965731"/>
+                <a:chExt cx="11748203" cy="1671394"/>
+              </a:xfrm>
+            </p:grpSpPr>
+            <p:pic>
+              <p:nvPicPr>
+                <p:cNvPr id="7" name="Bildobjekt 6" descr="En bild som visar linje, text, Parallell, skärmbild&#10;&#10;AI-genererat innehåll kan vara felaktigt.">
+                  <a:extLst>
+                    <a:ext uri="{FF2B5EF4-FFF2-40B4-BE49-F238E27FC236}">
+                      <a16:creationId xmlns:a16="http://schemas.microsoft.com/office/drawing/2014/main" id="{8C1A6423-65F6-A3C0-C1FA-63C5F3C8F796}"/>
+                    </a:ext>
+                  </a:extLst>
+                </p:cNvPr>
+                <p:cNvPicPr>
+                  <a:picLocks noChangeAspect="1"/>
+                </p:cNvPicPr>
+                <p:nvPr/>
+              </p:nvPicPr>
+              <p:blipFill>
+                <a:blip r:embed="rId3"/>
+                <a:srcRect b="5179"/>
+                <a:stretch>
+                  <a:fillRect/>
+                </a:stretch>
+              </p:blipFill>
+              <p:spPr>
+                <a:xfrm>
+                  <a:off x="149044" y="3965731"/>
+                  <a:ext cx="11748203" cy="1671394"/>
+                </a:xfrm>
+                <a:prstGeom prst="rect">
+                  <a:avLst/>
+                </a:prstGeom>
+              </p:spPr>
+            </p:pic>
+            <p:sp>
+              <p:nvSpPr>
+                <p:cNvPr id="2" name="Rektangel 1">
+                  <a:extLst>
+                    <a:ext uri="{FF2B5EF4-FFF2-40B4-BE49-F238E27FC236}">
+                      <a16:creationId xmlns:a16="http://schemas.microsoft.com/office/drawing/2014/main" id="{D0C8DDDA-F95E-CF15-1E25-88580CABB6A4}"/>
+                    </a:ext>
+                  </a:extLst>
+                </p:cNvPr>
+                <p:cNvSpPr/>
+                <p:nvPr/>
+              </p:nvSpPr>
+              <p:spPr>
+                <a:xfrm>
+                  <a:off x="1848899" y="5084180"/>
+                  <a:ext cx="472273" cy="112163"/>
+                </a:xfrm>
+                <a:prstGeom prst="rect">
+                  <a:avLst/>
+                </a:prstGeom>
+                <a:ln>
+                  <a:noFill/>
+                </a:ln>
+              </p:spPr>
+              <p:style>
+                <a:lnRef idx="2">
+                  <a:schemeClr val="accent6"/>
+                </a:lnRef>
+                <a:fillRef idx="1">
+                  <a:schemeClr val="lt1"/>
+                </a:fillRef>
+                <a:effectRef idx="0">
+                  <a:schemeClr val="accent6"/>
+                </a:effectRef>
+                <a:fontRef idx="minor">
+                  <a:schemeClr val="dk1"/>
+                </a:fontRef>
+              </p:style>
+              <p:txBody>
+                <a:bodyPr rtlCol="0" anchor="ctr"/>
+                <a:lstStyle/>
+                <a:p>
+                  <a:pPr algn="ctr"/>
+                  <a:endParaRPr lang="sv-SE"/>
+                </a:p>
+              </p:txBody>
+            </p:sp>
+            <p:sp>
+              <p:nvSpPr>
+                <p:cNvPr id="6" name="textruta 5">
+                  <a:extLst>
+                    <a:ext uri="{FF2B5EF4-FFF2-40B4-BE49-F238E27FC236}">
+                      <a16:creationId xmlns:a16="http://schemas.microsoft.com/office/drawing/2014/main" id="{6C22F5CF-9ADF-ECAA-8C96-64AE819400FD}"/>
+                    </a:ext>
+                  </a:extLst>
+                </p:cNvPr>
+                <p:cNvSpPr txBox="1"/>
+                <p:nvPr/>
+              </p:nvSpPr>
+              <p:spPr>
+                <a:xfrm>
+                  <a:off x="1758459" y="5042587"/>
+                  <a:ext cx="1021433" cy="215444"/>
+                </a:xfrm>
+                <a:prstGeom prst="rect">
+                  <a:avLst/>
+                </a:prstGeom>
+                <a:noFill/>
+              </p:spPr>
+              <p:txBody>
+                <a:bodyPr wrap="none" rtlCol="0">
+                  <a:spAutoFit/>
+                </a:bodyPr>
+                <a:lstStyle/>
+                <a:p>
+                  <a:r>
+                    <a:rPr lang="sv-SE" sz="800" dirty="0"/>
+                    <a:t>QgisKristianstad#1</a:t>
+                  </a:r>
+                </a:p>
+              </p:txBody>
+            </p:sp>
+          </p:grpSp>
+          <p:sp>
+            <p:nvSpPr>
+              <p:cNvPr id="9" name="Rektangel 8">
+                <a:extLst>
+                  <a:ext uri="{FF2B5EF4-FFF2-40B4-BE49-F238E27FC236}">
+                    <a16:creationId xmlns:a16="http://schemas.microsoft.com/office/drawing/2014/main" id="{8CAF2DAB-00A7-E13A-4295-DEE2831823A1}"/>
+                  </a:ext>
+                </a:extLst>
+              </p:cNvPr>
+              <p:cNvSpPr/>
+              <p:nvPr/>
+            </p:nvSpPr>
+            <p:spPr>
+              <a:xfrm>
+                <a:off x="10304854" y="5388077"/>
+                <a:ext cx="496070" cy="249048"/>
+              </a:xfrm>
+              <a:prstGeom prst="rect">
+                <a:avLst/>
+              </a:prstGeom>
+              <a:noFill/>
+              <a:ln w="38100">
+                <a:solidFill>
+                  <a:srgbClr val="C00000"/>
+                </a:solidFill>
+              </a:ln>
+            </p:spPr>
+            <p:style>
+              <a:lnRef idx="2">
+                <a:schemeClr val="accent1">
+                  <a:shade val="15000"/>
+                </a:schemeClr>
+              </a:lnRef>
+              <a:fillRef idx="1">
+                <a:schemeClr val="accent1"/>
+              </a:fillRef>
+              <a:effectRef idx="0">
+                <a:schemeClr val="accent1"/>
+              </a:effectRef>
+              <a:fontRef idx="minor">
+                <a:schemeClr val="lt1"/>
+              </a:fontRef>
+            </p:style>
+            <p:txBody>
+              <a:bodyPr rtlCol="0" anchor="ctr"/>
+              <a:lstStyle/>
+              <a:p>
+                <a:pPr algn="ctr"/>
+                <a:endParaRPr lang="sv-SE"/>
+              </a:p>
+            </p:txBody>
+          </p:sp>
+        </p:grpSp>
         <p:sp>
           <p:nvSpPr>
-            <p:cNvPr id="2" name="Rektangel 1">
+            <p:cNvPr id="11" name="Rektangel 10">
               <a:extLst>
                 <a:ext uri="{FF2B5EF4-FFF2-40B4-BE49-F238E27FC236}">
-                  <a16:creationId xmlns:a16="http://schemas.microsoft.com/office/drawing/2014/main" id="{D0C8DDDA-F95E-CF15-1E25-88580CABB6A4}"/>
+                  <a16:creationId xmlns:a16="http://schemas.microsoft.com/office/drawing/2014/main" id="{2C6C73C2-94E9-C709-FFC9-049480077714}"/>
                 </a:ext>
               </a:extLst>
             </p:cNvPr>
@@ -13650,28 +13826,33 @@
           </p:nvSpPr>
           <p:spPr>
             <a:xfrm>
-              <a:off x="1848899" y="5084180"/>
-              <a:ext cx="472273" cy="112163"/>
+              <a:off x="2703007" y="5021091"/>
+              <a:ext cx="944761" cy="215444"/>
             </a:xfrm>
             <a:prstGeom prst="rect">
               <a:avLst/>
             </a:prstGeom>
-            <a:ln>
-              <a:noFill/>
+            <a:noFill/>
+            <a:ln w="38100">
+              <a:solidFill>
+                <a:srgbClr val="C00000"/>
+              </a:solidFill>
             </a:ln>
           </p:spPr>
           <p:style>
             <a:lnRef idx="2">
-              <a:schemeClr val="accent6"/>
+              <a:schemeClr val="accent1">
+                <a:shade val="15000"/>
+              </a:schemeClr>
             </a:lnRef>
             <a:fillRef idx="1">
-              <a:schemeClr val="lt1"/>
+              <a:schemeClr val="accent1"/>
             </a:fillRef>
             <a:effectRef idx="0">
-              <a:schemeClr val="accent6"/>
+              <a:schemeClr val="accent1"/>
             </a:effectRef>
             <a:fontRef idx="minor">
-              <a:schemeClr val="dk1"/>
+              <a:schemeClr val="lt1"/>
             </a:fontRef>
           </p:style>
           <p:txBody>
@@ -13685,36 +13866,105 @@
         </p:sp>
         <p:sp>
           <p:nvSpPr>
-            <p:cNvPr id="6" name="textruta 5">
+            <p:cNvPr id="12" name="Rektangel 11">
               <a:extLst>
                 <a:ext uri="{FF2B5EF4-FFF2-40B4-BE49-F238E27FC236}">
-                  <a16:creationId xmlns:a16="http://schemas.microsoft.com/office/drawing/2014/main" id="{6C22F5CF-9ADF-ECAA-8C96-64AE819400FD}"/>
+                  <a16:creationId xmlns:a16="http://schemas.microsoft.com/office/drawing/2014/main" id="{5E331E61-AC1F-E7AF-F9D9-6ECD375CCF4B}"/>
                 </a:ext>
               </a:extLst>
             </p:cNvPr>
-            <p:cNvSpPr txBox="1"/>
+            <p:cNvSpPr/>
             <p:nvPr/>
           </p:nvSpPr>
           <p:spPr>
             <a:xfrm>
-              <a:off x="1758459" y="5042587"/>
-              <a:ext cx="1021433" cy="215444"/>
+              <a:off x="3724440" y="5021091"/>
+              <a:ext cx="1048527" cy="215444"/>
             </a:xfrm>
             <a:prstGeom prst="rect">
               <a:avLst/>
             </a:prstGeom>
             <a:noFill/>
+            <a:ln w="38100">
+              <a:solidFill>
+                <a:srgbClr val="C00000"/>
+              </a:solidFill>
+            </a:ln>
           </p:spPr>
+          <p:style>
+            <a:lnRef idx="2">
+              <a:schemeClr val="accent1">
+                <a:shade val="15000"/>
+              </a:schemeClr>
+            </a:lnRef>
+            <a:fillRef idx="1">
+              <a:schemeClr val="accent1"/>
+            </a:fillRef>
+            <a:effectRef idx="0">
+              <a:schemeClr val="accent1"/>
+            </a:effectRef>
+            <a:fontRef idx="minor">
+              <a:schemeClr val="lt1"/>
+            </a:fontRef>
+          </p:style>
           <p:txBody>
-            <a:bodyPr wrap="none" rtlCol="0">
-              <a:spAutoFit/>
-            </a:bodyPr>
+            <a:bodyPr rtlCol="0" anchor="ctr"/>
             <a:lstStyle/>
             <a:p>
-              <a:r>
-                <a:rPr lang="sv-SE" sz="800" dirty="0"/>
-                <a:t>QgisKristianstad#1</a:t>
-              </a:r>
+              <a:pPr algn="ctr"/>
+              <a:endParaRPr lang="sv-SE"/>
+            </a:p>
+          </p:txBody>
+        </p:sp>
+        <p:sp>
+          <p:nvSpPr>
+            <p:cNvPr id="13" name="Rektangel 12">
+              <a:extLst>
+                <a:ext uri="{FF2B5EF4-FFF2-40B4-BE49-F238E27FC236}">
+                  <a16:creationId xmlns:a16="http://schemas.microsoft.com/office/drawing/2014/main" id="{33D3A15F-CC8E-02CA-8FDD-DACC46A80963}"/>
+                </a:ext>
+              </a:extLst>
+            </p:cNvPr>
+            <p:cNvSpPr/>
+            <p:nvPr/>
+          </p:nvSpPr>
+          <p:spPr>
+            <a:xfrm>
+              <a:off x="4910150" y="5021091"/>
+              <a:ext cx="536057" cy="215444"/>
+            </a:xfrm>
+            <a:prstGeom prst="rect">
+              <a:avLst/>
+            </a:prstGeom>
+            <a:noFill/>
+            <a:ln w="38100">
+              <a:solidFill>
+                <a:srgbClr val="C00000"/>
+              </a:solidFill>
+            </a:ln>
+          </p:spPr>
+          <p:style>
+            <a:lnRef idx="2">
+              <a:schemeClr val="accent1">
+                <a:shade val="15000"/>
+              </a:schemeClr>
+            </a:lnRef>
+            <a:fillRef idx="1">
+              <a:schemeClr val="accent1"/>
+            </a:fillRef>
+            <a:effectRef idx="0">
+              <a:schemeClr val="accent1"/>
+            </a:effectRef>
+            <a:fontRef idx="minor">
+              <a:schemeClr val="lt1"/>
+            </a:fontRef>
+          </p:style>
+          <p:txBody>
+            <a:bodyPr rtlCol="0" anchor="ctr"/>
+            <a:lstStyle/>
+            <a:p>
+              <a:pPr algn="ctr"/>
+              <a:endParaRPr lang="sv-SE"/>
             </a:p>
           </p:txBody>
         </p:sp>

--- a/Origo_admin_tutorial_swedish.pptx
+++ b/Origo_admin_tutorial_swedish.pptx
@@ -165,6 +165,35 @@
 </p:presentation>
 </file>
 
+<file path=ppt/changesInfos/changesInfo1.xml><?xml version="1.0" encoding="utf-8"?>
+<pc:chgInfo xmlns:a="http://schemas.openxmlformats.org/drawingml/2006/main" xmlns:r="http://schemas.openxmlformats.org/officeDocument/2006/relationships" xmlns:ac="http://schemas.microsoft.com/office/drawing/2013/main/command" xmlns:pc="http://schemas.microsoft.com/office/powerpoint/2013/main/command">
+  <pc:docChgLst>
+    <pc:chgData name="Henrik Uggla" userId="a00d500d-bfb9-4930-bea3-9d1783f502ce" providerId="ADAL" clId="{20692384-DACC-40A5-A2E8-65CF348EBD3B}"/>
+    <pc:docChg chg="modSld">
+      <pc:chgData name="Henrik Uggla" userId="a00d500d-bfb9-4930-bea3-9d1783f502ce" providerId="ADAL" clId="{20692384-DACC-40A5-A2E8-65CF348EBD3B}" dt="2026-05-12T09:10:45.561" v="0" actId="20577"/>
+      <pc:docMkLst>
+        <pc:docMk/>
+      </pc:docMkLst>
+      <pc:sldChg chg="modSp mod">
+        <pc:chgData name="Henrik Uggla" userId="a00d500d-bfb9-4930-bea3-9d1783f502ce" providerId="ADAL" clId="{20692384-DACC-40A5-A2E8-65CF348EBD3B}" dt="2026-05-12T09:10:45.561" v="0" actId="20577"/>
+        <pc:sldMkLst>
+          <pc:docMk/>
+          <pc:sldMk cId="2001531799" sldId="347"/>
+        </pc:sldMkLst>
+        <pc:spChg chg="mod">
+          <ac:chgData name="Henrik Uggla" userId="a00d500d-bfb9-4930-bea3-9d1783f502ce" providerId="ADAL" clId="{20692384-DACC-40A5-A2E8-65CF348EBD3B}" dt="2026-05-12T09:10:45.561" v="0" actId="20577"/>
+          <ac:spMkLst>
+            <pc:docMk/>
+            <pc:sldMk cId="2001531799" sldId="347"/>
+            <ac:spMk id="4" creationId="{CF0F2F2D-72FC-70A0-3BE4-24D2278435E6}"/>
+          </ac:spMkLst>
+        </pc:spChg>
+      </pc:sldChg>
+    </pc:docChg>
+  </pc:docChgLst>
+</pc:chgInfo>
+</file>
+
 <file path=ppt/notesMasters/notesMaster1.xml><?xml version="1.0" encoding="utf-8"?>
 <p:notesMaster xmlns:a="http://schemas.openxmlformats.org/drawingml/2006/main" xmlns:r="http://schemas.openxmlformats.org/officeDocument/2006/relationships" xmlns:p="http://schemas.openxmlformats.org/presentationml/2006/main">
   <p:cSld>
@@ -247,7 +276,7 @@
           <a:p>
             <a:fld id="{2105AD5F-378A-4E69-A069-43E8F66DA733}" type="datetimeFigureOut">
               <a:rPr lang="sv-SE" smtClean="0"/>
-              <a:t>2026-03-24</a:t>
+              <a:t>2026-05-12</a:t>
             </a:fld>
             <a:endParaRPr lang="sv-SE"/>
           </a:p>
@@ -1051,7 +1080,7 @@
           <a:p>
             <a:fld id="{D8D49A41-4903-4E30-BEC5-3ED4B3E2B810}" type="datetimeFigureOut">
               <a:rPr lang="sv-SE" smtClean="0"/>
-              <a:t>2026-03-24</a:t>
+              <a:t>2026-05-12</a:t>
             </a:fld>
             <a:endParaRPr lang="sv-SE"/>
           </a:p>
@@ -1357,7 +1386,7 @@
           <a:p>
             <a:fld id="{D8D49A41-4903-4E30-BEC5-3ED4B3E2B810}" type="datetimeFigureOut">
               <a:rPr lang="sv-SE" smtClean="0"/>
-              <a:t>2026-03-24</a:t>
+              <a:t>2026-05-12</a:t>
             </a:fld>
             <a:endParaRPr lang="sv-SE"/>
           </a:p>
@@ -1621,7 +1650,7 @@
           <a:p>
             <a:fld id="{D8D49A41-4903-4E30-BEC5-3ED4B3E2B810}" type="datetimeFigureOut">
               <a:rPr lang="sv-SE" smtClean="0"/>
-              <a:t>2026-03-24</a:t>
+              <a:t>2026-05-12</a:t>
             </a:fld>
             <a:endParaRPr lang="sv-SE"/>
           </a:p>
@@ -1834,7 +1863,7 @@
           <a:p>
             <a:fld id="{D8D49A41-4903-4E30-BEC5-3ED4B3E2B810}" type="datetimeFigureOut">
               <a:rPr lang="sv-SE" smtClean="0"/>
-              <a:t>2026-03-24</a:t>
+              <a:t>2026-05-12</a:t>
             </a:fld>
             <a:endParaRPr lang="sv-SE"/>
           </a:p>
@@ -2047,7 +2076,7 @@
           <a:p>
             <a:fld id="{D8D49A41-4903-4E30-BEC5-3ED4B3E2B810}" type="datetimeFigureOut">
               <a:rPr lang="sv-SE" smtClean="0"/>
-              <a:t>2026-03-24</a:t>
+              <a:t>2026-05-12</a:t>
             </a:fld>
             <a:endParaRPr lang="sv-SE"/>
           </a:p>
@@ -2284,7 +2313,7 @@
           <a:p>
             <a:fld id="{D8D49A41-4903-4E30-BEC5-3ED4B3E2B810}" type="datetimeFigureOut">
               <a:rPr lang="sv-SE" smtClean="0"/>
-              <a:t>2026-03-24</a:t>
+              <a:t>2026-05-12</a:t>
             </a:fld>
             <a:endParaRPr lang="sv-SE"/>
           </a:p>
@@ -2413,7 +2442,7 @@
           <a:p>
             <a:fld id="{D8D49A41-4903-4E30-BEC5-3ED4B3E2B810}" type="datetimeFigureOut">
               <a:rPr lang="sv-SE" smtClean="0"/>
-              <a:t>2026-03-24</a:t>
+              <a:t>2026-05-12</a:t>
             </a:fld>
             <a:endParaRPr lang="sv-SE"/>
           </a:p>
@@ -2855,7 +2884,7 @@
           <a:p>
             <a:fld id="{D8D49A41-4903-4E30-BEC5-3ED4B3E2B810}" type="datetimeFigureOut">
               <a:rPr lang="sv-SE" smtClean="0"/>
-              <a:t>2026-03-24</a:t>
+              <a:t>2026-05-12</a:t>
             </a:fld>
             <a:endParaRPr lang="sv-SE"/>
           </a:p>
@@ -3161,7 +3190,7 @@
           <a:p>
             <a:fld id="{D8D49A41-4903-4E30-BEC5-3ED4B3E2B810}" type="datetimeFigureOut">
               <a:rPr lang="sv-SE" smtClean="0"/>
-              <a:t>2026-03-24</a:t>
+              <a:t>2026-05-12</a:t>
             </a:fld>
             <a:endParaRPr lang="sv-SE"/>
           </a:p>
@@ -3410,7 +3439,7 @@
           <a:p>
             <a:fld id="{D8D49A41-4903-4E30-BEC5-3ED4B3E2B810}" type="datetimeFigureOut">
               <a:rPr lang="sv-SE" smtClean="0"/>
-              <a:t>2026-03-24</a:t>
+              <a:t>2026-05-12</a:t>
             </a:fld>
             <a:endParaRPr lang="sv-SE"/>
           </a:p>
@@ -3731,7 +3760,7 @@
           <a:p>
             <a:fld id="{D8D49A41-4903-4E30-BEC5-3ED4B3E2B810}" type="datetimeFigureOut">
               <a:rPr lang="sv-SE" smtClean="0"/>
-              <a:t>2026-03-24</a:t>
+              <a:t>2026-05-12</a:t>
             </a:fld>
             <a:endParaRPr lang="sv-SE"/>
           </a:p>
@@ -3944,7 +3973,7 @@
           <a:p>
             <a:fld id="{D8D49A41-4903-4E30-BEC5-3ED4B3E2B810}" type="datetimeFigureOut">
               <a:rPr lang="sv-SE" smtClean="0"/>
-              <a:t>2026-03-24</a:t>
+              <a:t>2026-05-12</a:t>
             </a:fld>
             <a:endParaRPr lang="sv-SE"/>
           </a:p>
@@ -4157,7 +4186,7 @@
           <a:p>
             <a:fld id="{D8D49A41-4903-4E30-BEC5-3ED4B3E2B810}" type="datetimeFigureOut">
               <a:rPr lang="sv-SE" smtClean="0"/>
-              <a:t>2026-03-24</a:t>
+              <a:t>2026-05-12</a:t>
             </a:fld>
             <a:endParaRPr lang="sv-SE"/>
           </a:p>
@@ -4394,7 +4423,7 @@
           <a:p>
             <a:fld id="{D8D49A41-4903-4E30-BEC5-3ED4B3E2B810}" type="datetimeFigureOut">
               <a:rPr lang="sv-SE" smtClean="0"/>
-              <a:t>2026-03-24</a:t>
+              <a:t>2026-05-12</a:t>
             </a:fld>
             <a:endParaRPr lang="sv-SE"/>
           </a:p>
@@ -4523,7 +4552,7 @@
           <a:p>
             <a:fld id="{D8D49A41-4903-4E30-BEC5-3ED4B3E2B810}" type="datetimeFigureOut">
               <a:rPr lang="sv-SE" smtClean="0"/>
-              <a:t>2026-03-24</a:t>
+              <a:t>2026-05-12</a:t>
             </a:fld>
             <a:endParaRPr lang="sv-SE"/>
           </a:p>
@@ -4965,7 +4994,7 @@
           <a:p>
             <a:fld id="{D8D49A41-4903-4E30-BEC5-3ED4B3E2B810}" type="datetimeFigureOut">
               <a:rPr lang="sv-SE" smtClean="0"/>
-              <a:t>2026-03-24</a:t>
+              <a:t>2026-05-12</a:t>
             </a:fld>
             <a:endParaRPr lang="sv-SE"/>
           </a:p>
@@ -5271,7 +5300,7 @@
           <a:p>
             <a:fld id="{D8D49A41-4903-4E30-BEC5-3ED4B3E2B810}" type="datetimeFigureOut">
               <a:rPr lang="sv-SE" smtClean="0"/>
-              <a:t>2026-03-24</a:t>
+              <a:t>2026-05-12</a:t>
             </a:fld>
             <a:endParaRPr lang="sv-SE"/>
           </a:p>
@@ -5535,7 +5564,7 @@
           <a:p>
             <a:fld id="{D8D49A41-4903-4E30-BEC5-3ED4B3E2B810}" type="datetimeFigureOut">
               <a:rPr lang="sv-SE" smtClean="0"/>
-              <a:t>2026-03-24</a:t>
+              <a:t>2026-05-12</a:t>
             </a:fld>
             <a:endParaRPr lang="sv-SE"/>
           </a:p>
@@ -5748,7 +5777,7 @@
           <a:p>
             <a:fld id="{D8D49A41-4903-4E30-BEC5-3ED4B3E2B810}" type="datetimeFigureOut">
               <a:rPr lang="sv-SE" smtClean="0"/>
-              <a:t>2026-03-24</a:t>
+              <a:t>2026-05-12</a:t>
             </a:fld>
             <a:endParaRPr lang="sv-SE"/>
           </a:p>
@@ -6018,7 +6047,7 @@
           <a:p>
             <a:fld id="{D8D49A41-4903-4E30-BEC5-3ED4B3E2B810}" type="datetimeFigureOut">
               <a:rPr lang="sv-SE" smtClean="0"/>
-              <a:t>2026-03-24</a:t>
+              <a:t>2026-05-12</a:t>
             </a:fld>
             <a:endParaRPr lang="sv-SE"/>
           </a:p>
@@ -6267,7 +6296,7 @@
           <a:p>
             <a:fld id="{D8D49A41-4903-4E30-BEC5-3ED4B3E2B810}" type="datetimeFigureOut">
               <a:rPr lang="sv-SE" smtClean="0"/>
-              <a:t>2026-03-24</a:t>
+              <a:t>2026-05-12</a:t>
             </a:fld>
             <a:endParaRPr lang="sv-SE"/>
           </a:p>
@@ -6504,7 +6533,7 @@
           <a:p>
             <a:fld id="{D8D49A41-4903-4E30-BEC5-3ED4B3E2B810}" type="datetimeFigureOut">
               <a:rPr lang="sv-SE" smtClean="0"/>
-              <a:t>2026-03-24</a:t>
+              <a:t>2026-05-12</a:t>
             </a:fld>
             <a:endParaRPr lang="sv-SE"/>
           </a:p>
@@ -6633,7 +6662,7 @@
           <a:p>
             <a:fld id="{D8D49A41-4903-4E30-BEC5-3ED4B3E2B810}" type="datetimeFigureOut">
               <a:rPr lang="sv-SE" smtClean="0"/>
-              <a:t>2026-03-24</a:t>
+              <a:t>2026-05-12</a:t>
             </a:fld>
             <a:endParaRPr lang="sv-SE"/>
           </a:p>
@@ -7075,7 +7104,7 @@
           <a:p>
             <a:fld id="{D8D49A41-4903-4E30-BEC5-3ED4B3E2B810}" type="datetimeFigureOut">
               <a:rPr lang="sv-SE" smtClean="0"/>
-              <a:t>2026-03-24</a:t>
+              <a:t>2026-05-12</a:t>
             </a:fld>
             <a:endParaRPr lang="sv-SE"/>
           </a:p>
@@ -7381,7 +7410,7 @@
           <a:p>
             <a:fld id="{D8D49A41-4903-4E30-BEC5-3ED4B3E2B810}" type="datetimeFigureOut">
               <a:rPr lang="sv-SE" smtClean="0"/>
-              <a:t>2026-03-24</a:t>
+              <a:t>2026-05-12</a:t>
             </a:fld>
             <a:endParaRPr lang="sv-SE"/>
           </a:p>
@@ -7645,7 +7674,7 @@
           <a:p>
             <a:fld id="{D8D49A41-4903-4E30-BEC5-3ED4B3E2B810}" type="datetimeFigureOut">
               <a:rPr lang="sv-SE" smtClean="0"/>
-              <a:t>2026-03-24</a:t>
+              <a:t>2026-05-12</a:t>
             </a:fld>
             <a:endParaRPr lang="sv-SE"/>
           </a:p>
@@ -7858,7 +7887,7 @@
           <a:p>
             <a:fld id="{D8D49A41-4903-4E30-BEC5-3ED4B3E2B810}" type="datetimeFigureOut">
               <a:rPr lang="sv-SE" smtClean="0"/>
-              <a:t>2026-03-24</a:t>
+              <a:t>2026-05-12</a:t>
             </a:fld>
             <a:endParaRPr lang="sv-SE"/>
           </a:p>
@@ -8071,7 +8100,7 @@
           <a:p>
             <a:fld id="{D8D49A41-4903-4E30-BEC5-3ED4B3E2B810}" type="datetimeFigureOut">
               <a:rPr lang="sv-SE" smtClean="0"/>
-              <a:t>2026-03-24</a:t>
+              <a:t>2026-05-12</a:t>
             </a:fld>
             <a:endParaRPr lang="sv-SE"/>
           </a:p>
@@ -8308,7 +8337,7 @@
           <a:p>
             <a:fld id="{D8D49A41-4903-4E30-BEC5-3ED4B3E2B810}" type="datetimeFigureOut">
               <a:rPr lang="sv-SE" smtClean="0"/>
-              <a:t>2026-03-24</a:t>
+              <a:t>2026-05-12</a:t>
             </a:fld>
             <a:endParaRPr lang="sv-SE"/>
           </a:p>
@@ -8539,7 +8568,7 @@
           <a:p>
             <a:fld id="{D8D49A41-4903-4E30-BEC5-3ED4B3E2B810}" type="datetimeFigureOut">
               <a:rPr lang="sv-SE" smtClean="0"/>
-              <a:t>2026-03-24</a:t>
+              <a:t>2026-05-12</a:t>
             </a:fld>
             <a:endParaRPr lang="sv-SE"/>
           </a:p>
@@ -8652,7 +8681,7 @@
           <a:p>
             <a:fld id="{D8D49A41-4903-4E30-BEC5-3ED4B3E2B810}" type="datetimeFigureOut">
               <a:rPr lang="sv-SE" smtClean="0"/>
-              <a:t>2026-03-24</a:t>
+              <a:t>2026-05-12</a:t>
             </a:fld>
             <a:endParaRPr lang="sv-SE"/>
           </a:p>
@@ -8867,7 +8896,7 @@
           <a:p>
             <a:fld id="{D8D49A41-4903-4E30-BEC5-3ED4B3E2B810}" type="datetimeFigureOut">
               <a:rPr lang="sv-SE" smtClean="0"/>
-              <a:t>2026-03-24</a:t>
+              <a:t>2026-05-12</a:t>
             </a:fld>
             <a:endParaRPr lang="sv-SE"/>
           </a:p>
@@ -9178,7 +9207,7 @@
           <a:p>
             <a:fld id="{D8D49A41-4903-4E30-BEC5-3ED4B3E2B810}" type="datetimeFigureOut">
               <a:rPr lang="sv-SE" smtClean="0"/>
-              <a:t>2026-03-24</a:t>
+              <a:t>2026-05-12</a:t>
             </a:fld>
             <a:endParaRPr lang="sv-SE"/>
           </a:p>
@@ -9320,7 +9349,7 @@
           <a:p>
             <a:fld id="{D8D49A41-4903-4E30-BEC5-3ED4B3E2B810}" type="datetimeFigureOut">
               <a:rPr lang="sv-SE" smtClean="0"/>
-              <a:t>2026-03-24</a:t>
+              <a:t>2026-05-12</a:t>
             </a:fld>
             <a:endParaRPr lang="sv-SE"/>
           </a:p>
@@ -9449,7 +9478,7 @@
           <a:p>
             <a:fld id="{D8D49A41-4903-4E30-BEC5-3ED4B3E2B810}" type="datetimeFigureOut">
               <a:rPr lang="sv-SE" smtClean="0"/>
-              <a:t>2026-03-24</a:t>
+              <a:t>2026-05-12</a:t>
             </a:fld>
             <a:endParaRPr lang="sv-SE"/>
           </a:p>
@@ -9933,7 +9962,7 @@
             <a:fld id="{D8D49A41-4903-4E30-BEC5-3ED4B3E2B810}" type="datetimeFigureOut">
               <a:rPr lang="sv-SE" smtClean="0"/>
               <a:pPr/>
-              <a:t>2026-03-24</a:t>
+              <a:t>2026-05-12</a:t>
             </a:fld>
             <a:endParaRPr lang="sv-SE"/>
           </a:p>
@@ -10545,7 +10574,7 @@
             <a:fld id="{D8D49A41-4903-4E30-BEC5-3ED4B3E2B810}" type="datetimeFigureOut">
               <a:rPr lang="sv-SE" smtClean="0"/>
               <a:pPr/>
-              <a:t>2026-03-24</a:t>
+              <a:t>2026-05-12</a:t>
             </a:fld>
             <a:endParaRPr lang="sv-SE"/>
           </a:p>
@@ -11192,7 +11221,7 @@
             <a:fld id="{D8D49A41-4903-4E30-BEC5-3ED4B3E2B810}" type="datetimeFigureOut">
               <a:rPr lang="sv-SE" smtClean="0"/>
               <a:pPr/>
-              <a:t>2026-03-24</a:t>
+              <a:t>2026-05-12</a:t>
             </a:fld>
             <a:endParaRPr lang="sv-SE"/>
           </a:p>
@@ -11804,7 +11833,7 @@
             <a:fld id="{D8D49A41-4903-4E30-BEC5-3ED4B3E2B810}" type="datetimeFigureOut">
               <a:rPr lang="sv-SE" smtClean="0"/>
               <a:pPr/>
-              <a:t>2026-03-24</a:t>
+              <a:t>2026-05-12</a:t>
             </a:fld>
             <a:endParaRPr lang="sv-SE"/>
           </a:p>
@@ -12416,7 +12445,7 @@
             <a:fld id="{D8D49A41-4903-4E30-BEC5-3ED4B3E2B810}" type="datetimeFigureOut">
               <a:rPr lang="sv-SE" smtClean="0"/>
               <a:pPr/>
-              <a:t>2026-03-24</a:t>
+              <a:t>2026-05-12</a:t>
             </a:fld>
             <a:endParaRPr lang="sv-SE"/>
           </a:p>
@@ -16981,8 +17010,12 @@
               <a:t>adm</a:t>
             </a:r>
             <a:r>
+              <a:rPr lang="sv-SE" sz="2000"/>
+              <a:t>/ </a:t>
+            </a:r>
+            <a:r>
               <a:rPr lang="sv-SE" sz="2000" dirty="0"/>
-              <a:t> till adressen i webbläsaren och ladda om sidan.</a:t>
+              <a:t>till adressen i webbläsaren och ladda om sidan.</a:t>
             </a:r>
           </a:p>
           <a:p>
@@ -23140,15 +23173,6 @@
 </file>
 
 <file path=customXml/item1.xml><?xml version="1.0" encoding="utf-8"?>
-<?mso-contentType ?>
-<FormTemplates xmlns="http://schemas.microsoft.com/sharepoint/v3/contenttype/forms">
-  <Display>DocumentLibraryForm</Display>
-  <Edit>DocumentLibraryForm</Edit>
-  <New>DocumentLibraryForm</New>
-</FormTemplates>
-</file>
-
-<file path=customXml/item2.xml><?xml version="1.0" encoding="utf-8"?>
 <ct:contentTypeSchema xmlns:ct="http://schemas.microsoft.com/office/2006/metadata/contentType" xmlns:ma="http://schemas.microsoft.com/office/2006/metadata/properties/metaAttributes" ct:_="" ma:_="" ma:contentTypeName="dokument" ma:contentTypeID="0x010100BF93C0C5EE7F83438D3374EF6FC6CFE8" ma:contentTypeVersion="6" ma:contentTypeDescription="Skapa ett nytt dokument." ma:contentTypeScope="" ma:versionID="47a8963a7c37e56dddba9289e5978949">
   <xsd:schema xmlns:xsd="http://www.w3.org/2001/XMLSchema" xmlns:xs="http://www.w3.org/2001/XMLSchema" xmlns:p="http://schemas.microsoft.com/office/2006/metadata/properties" xmlns:ns2="630a2048-6a54-4210-bba6-95b147291d33" xmlns:ns3="43cfa058-710b-45d5-80d9-51034d8b2dca" targetNamespace="http://schemas.microsoft.com/office/2006/metadata/properties" ma:root="true" ma:fieldsID="3eb248da3570b7edd177235fee2ed6f5" ns2:_="" ns3:_="">
     <xsd:import namespace="630a2048-6a54-4210-bba6-95b147291d33"/>
@@ -23325,6 +23349,15 @@
 </ct:contentTypeSchema>
 </file>
 
+<file path=customXml/item2.xml><?xml version="1.0" encoding="utf-8"?>
+<?mso-contentType ?>
+<FormTemplates xmlns="http://schemas.microsoft.com/sharepoint/v3/contenttype/forms">
+  <Display>DocumentLibraryForm</Display>
+  <Edit>DocumentLibraryForm</Edit>
+  <New>DocumentLibraryForm</New>
+</FormTemplates>
+</file>
+
 <file path=customXml/item3.xml><?xml version="1.0" encoding="utf-8"?>
 <p:properties xmlns:p="http://schemas.microsoft.com/office/2006/metadata/properties" xmlns:xsi="http://www.w3.org/2001/XMLSchema-instance" xmlns:pc="http://schemas.microsoft.com/office/infopath/2007/PartnerControls">
   <documentManagement/>
@@ -23332,14 +23365,6 @@
 </file>
 
 <file path=customXml/itemProps1.xml><?xml version="1.0" encoding="utf-8"?>
-<ds:datastoreItem xmlns:ds="http://schemas.openxmlformats.org/officeDocument/2006/customXml" ds:itemID="{58E68E51-B06E-4E0F-ABEE-C754E002158D}">
-  <ds:schemaRefs>
-    <ds:schemaRef ds:uri="http://schemas.microsoft.com/sharepoint/v3/contenttype/forms"/>
-  </ds:schemaRefs>
-</ds:datastoreItem>
-</file>
-
-<file path=customXml/itemProps2.xml><?xml version="1.0" encoding="utf-8"?>
 <ds:datastoreItem xmlns:ds="http://schemas.openxmlformats.org/officeDocument/2006/customXml" ds:itemID="{A27087E6-7CF9-4CCE-84CA-97F5AB54E191}">
   <ds:schemaRefs>
     <ds:schemaRef ds:uri="http://schemas.microsoft.com/office/2006/metadata/contentType"/>
@@ -23358,6 +23383,14 @@
 </ds:datastoreItem>
 </file>
 
+<file path=customXml/itemProps2.xml><?xml version="1.0" encoding="utf-8"?>
+<ds:datastoreItem xmlns:ds="http://schemas.openxmlformats.org/officeDocument/2006/customXml" ds:itemID="{58E68E51-B06E-4E0F-ABEE-C754E002158D}">
+  <ds:schemaRefs>
+    <ds:schemaRef ds:uri="http://schemas.microsoft.com/sharepoint/v3/contenttype/forms"/>
+  </ds:schemaRefs>
+</ds:datastoreItem>
+</file>
+
 <file path=customXml/itemProps3.xml><?xml version="1.0" encoding="utf-8"?>
 <ds:datastoreItem xmlns:ds="http://schemas.openxmlformats.org/officeDocument/2006/customXml" ds:itemID="{983C3FF3-C4B2-4E0C-A8BA-FDE126DD742C}">
   <ds:schemaRefs>

--- a/Origo_admin_tutorial_swedish.pptx
+++ b/Origo_admin_tutorial_swedish.pptx
@@ -276,7 +276,7 @@
           <a:p>
             <a:fld id="{2105AD5F-378A-4E69-A069-43E8F66DA733}" type="datetimeFigureOut">
               <a:rPr lang="sv-SE" smtClean="0"/>
-              <a:t>2026-05-12</a:t>
+              <a:t>2026-09-11</a:t>
             </a:fld>
             <a:endParaRPr lang="sv-SE"/>
           </a:p>
@@ -1080,7 +1080,7 @@
           <a:p>
             <a:fld id="{D8D49A41-4903-4E30-BEC5-3ED4B3E2B810}" type="datetimeFigureOut">
               <a:rPr lang="sv-SE" smtClean="0"/>
-              <a:t>2026-05-12</a:t>
+              <a:t>2026-09-11</a:t>
             </a:fld>
             <a:endParaRPr lang="sv-SE"/>
           </a:p>
@@ -1386,7 +1386,7 @@
           <a:p>
             <a:fld id="{D8D49A41-4903-4E30-BEC5-3ED4B3E2B810}" type="datetimeFigureOut">
               <a:rPr lang="sv-SE" smtClean="0"/>
-              <a:t>2026-05-12</a:t>
+              <a:t>2026-09-11</a:t>
             </a:fld>
             <a:endParaRPr lang="sv-SE"/>
           </a:p>
@@ -1650,7 +1650,7 @@
           <a:p>
             <a:fld id="{D8D49A41-4903-4E30-BEC5-3ED4B3E2B810}" type="datetimeFigureOut">
               <a:rPr lang="sv-SE" smtClean="0"/>
-              <a:t>2026-05-12</a:t>
+              <a:t>2026-09-11</a:t>
             </a:fld>
             <a:endParaRPr lang="sv-SE"/>
           </a:p>
@@ -1863,7 +1863,7 @@
           <a:p>
             <a:fld id="{D8D49A41-4903-4E30-BEC5-3ED4B3E2B810}" type="datetimeFigureOut">
               <a:rPr lang="sv-SE" smtClean="0"/>
-              <a:t>2026-05-12</a:t>
+              <a:t>2026-09-11</a:t>
             </a:fld>
             <a:endParaRPr lang="sv-SE"/>
           </a:p>
@@ -2076,7 +2076,7 @@
           <a:p>
             <a:fld id="{D8D49A41-4903-4E30-BEC5-3ED4B3E2B810}" type="datetimeFigureOut">
               <a:rPr lang="sv-SE" smtClean="0"/>
-              <a:t>2026-05-12</a:t>
+              <a:t>2026-09-11</a:t>
             </a:fld>
             <a:endParaRPr lang="sv-SE"/>
           </a:p>
@@ -2313,7 +2313,7 @@
           <a:p>
             <a:fld id="{D8D49A41-4903-4E30-BEC5-3ED4B3E2B810}" type="datetimeFigureOut">
               <a:rPr lang="sv-SE" smtClean="0"/>
-              <a:t>2026-05-12</a:t>
+              <a:t>2026-09-11</a:t>
             </a:fld>
             <a:endParaRPr lang="sv-SE"/>
           </a:p>
@@ -2442,7 +2442,7 @@
           <a:p>
             <a:fld id="{D8D49A41-4903-4E30-BEC5-3ED4B3E2B810}" type="datetimeFigureOut">
               <a:rPr lang="sv-SE" smtClean="0"/>
-              <a:t>2026-05-12</a:t>
+              <a:t>2026-09-11</a:t>
             </a:fld>
             <a:endParaRPr lang="sv-SE"/>
           </a:p>
@@ -2884,7 +2884,7 @@
           <a:p>
             <a:fld id="{D8D49A41-4903-4E30-BEC5-3ED4B3E2B810}" type="datetimeFigureOut">
               <a:rPr lang="sv-SE" smtClean="0"/>
-              <a:t>2026-05-12</a:t>
+              <a:t>2026-09-11</a:t>
             </a:fld>
             <a:endParaRPr lang="sv-SE"/>
           </a:p>
@@ -3190,7 +3190,7 @@
           <a:p>
             <a:fld id="{D8D49A41-4903-4E30-BEC5-3ED4B3E2B810}" type="datetimeFigureOut">
               <a:rPr lang="sv-SE" smtClean="0"/>
-              <a:t>2026-05-12</a:t>
+              <a:t>2026-09-11</a:t>
             </a:fld>
             <a:endParaRPr lang="sv-SE"/>
           </a:p>
@@ -3439,7 +3439,7 @@
           <a:p>
             <a:fld id="{D8D49A41-4903-4E30-BEC5-3ED4B3E2B810}" type="datetimeFigureOut">
               <a:rPr lang="sv-SE" smtClean="0"/>
-              <a:t>2026-05-12</a:t>
+              <a:t>2026-09-11</a:t>
             </a:fld>
             <a:endParaRPr lang="sv-SE"/>
           </a:p>
@@ -3760,7 +3760,7 @@
           <a:p>
             <a:fld id="{D8D49A41-4903-4E30-BEC5-3ED4B3E2B810}" type="datetimeFigureOut">
               <a:rPr lang="sv-SE" smtClean="0"/>
-              <a:t>2026-05-12</a:t>
+              <a:t>2026-09-11</a:t>
             </a:fld>
             <a:endParaRPr lang="sv-SE"/>
           </a:p>
@@ -3973,7 +3973,7 @@
           <a:p>
             <a:fld id="{D8D49A41-4903-4E30-BEC5-3ED4B3E2B810}" type="datetimeFigureOut">
               <a:rPr lang="sv-SE" smtClean="0"/>
-              <a:t>2026-05-12</a:t>
+              <a:t>2026-09-11</a:t>
             </a:fld>
             <a:endParaRPr lang="sv-SE"/>
           </a:p>
@@ -4186,7 +4186,7 @@
           <a:p>
             <a:fld id="{D8D49A41-4903-4E30-BEC5-3ED4B3E2B810}" type="datetimeFigureOut">
               <a:rPr lang="sv-SE" smtClean="0"/>
-              <a:t>2026-05-12</a:t>
+              <a:t>2026-09-11</a:t>
             </a:fld>
             <a:endParaRPr lang="sv-SE"/>
           </a:p>
@@ -4423,7 +4423,7 @@
           <a:p>
             <a:fld id="{D8D49A41-4903-4E30-BEC5-3ED4B3E2B810}" type="datetimeFigureOut">
               <a:rPr lang="sv-SE" smtClean="0"/>
-              <a:t>2026-05-12</a:t>
+              <a:t>2026-09-11</a:t>
             </a:fld>
             <a:endParaRPr lang="sv-SE"/>
           </a:p>
@@ -4552,7 +4552,7 @@
           <a:p>
             <a:fld id="{D8D49A41-4903-4E30-BEC5-3ED4B3E2B810}" type="datetimeFigureOut">
               <a:rPr lang="sv-SE" smtClean="0"/>
-              <a:t>2026-05-12</a:t>
+              <a:t>2026-09-11</a:t>
             </a:fld>
             <a:endParaRPr lang="sv-SE"/>
           </a:p>
@@ -4994,7 +4994,7 @@
           <a:p>
             <a:fld id="{D8D49A41-4903-4E30-BEC5-3ED4B3E2B810}" type="datetimeFigureOut">
               <a:rPr lang="sv-SE" smtClean="0"/>
-              <a:t>2026-05-12</a:t>
+              <a:t>2026-09-11</a:t>
             </a:fld>
             <a:endParaRPr lang="sv-SE"/>
           </a:p>
@@ -5300,7 +5300,7 @@
           <a:p>
             <a:fld id="{D8D49A41-4903-4E30-BEC5-3ED4B3E2B810}" type="datetimeFigureOut">
               <a:rPr lang="sv-SE" smtClean="0"/>
-              <a:t>2026-05-12</a:t>
+              <a:t>2026-09-11</a:t>
             </a:fld>
             <a:endParaRPr lang="sv-SE"/>
           </a:p>
@@ -5564,7 +5564,7 @@
           <a:p>
             <a:fld id="{D8D49A41-4903-4E30-BEC5-3ED4B3E2B810}" type="datetimeFigureOut">
               <a:rPr lang="sv-SE" smtClean="0"/>
-              <a:t>2026-05-12</a:t>
+              <a:t>2026-09-11</a:t>
             </a:fld>
             <a:endParaRPr lang="sv-SE"/>
           </a:p>
@@ -5777,7 +5777,7 @@
           <a:p>
             <a:fld id="{D8D49A41-4903-4E30-BEC5-3ED4B3E2B810}" type="datetimeFigureOut">
               <a:rPr lang="sv-SE" smtClean="0"/>
-              <a:t>2026-05-12</a:t>
+              <a:t>2026-09-11</a:t>
             </a:fld>
             <a:endParaRPr lang="sv-SE"/>
           </a:p>
@@ -6047,7 +6047,7 @@
           <a:p>
             <a:fld id="{D8D49A41-4903-4E30-BEC5-3ED4B3E2B810}" type="datetimeFigureOut">
               <a:rPr lang="sv-SE" smtClean="0"/>
-              <a:t>2026-05-12</a:t>
+              <a:t>2026-09-11</a:t>
             </a:fld>
             <a:endParaRPr lang="sv-SE"/>
           </a:p>
@@ -6296,7 +6296,7 @@
           <a:p>
             <a:fld id="{D8D49A41-4903-4E30-BEC5-3ED4B3E2B810}" type="datetimeFigureOut">
               <a:rPr lang="sv-SE" smtClean="0"/>
-              <a:t>2026-05-12</a:t>
+              <a:t>2026-09-11</a:t>
             </a:fld>
             <a:endParaRPr lang="sv-SE"/>
           </a:p>
@@ -6533,7 +6533,7 @@
           <a:p>
             <a:fld id="{D8D49A41-4903-4E30-BEC5-3ED4B3E2B810}" type="datetimeFigureOut">
               <a:rPr lang="sv-SE" smtClean="0"/>
-              <a:t>2026-05-12</a:t>
+              <a:t>2026-09-11</a:t>
             </a:fld>
             <a:endParaRPr lang="sv-SE"/>
           </a:p>
@@ -6662,7 +6662,7 @@
           <a:p>
             <a:fld id="{D8D49A41-4903-4E30-BEC5-3ED4B3E2B810}" type="datetimeFigureOut">
               <a:rPr lang="sv-SE" smtClean="0"/>
-              <a:t>2026-05-12</a:t>
+              <a:t>2026-09-11</a:t>
             </a:fld>
             <a:endParaRPr lang="sv-SE"/>
           </a:p>
@@ -7104,7 +7104,7 @@
           <a:p>
             <a:fld id="{D8D49A41-4903-4E30-BEC5-3ED4B3E2B810}" type="datetimeFigureOut">
               <a:rPr lang="sv-SE" smtClean="0"/>
-              <a:t>2026-05-12</a:t>
+              <a:t>2026-09-11</a:t>
             </a:fld>
             <a:endParaRPr lang="sv-SE"/>
           </a:p>
@@ -7410,7 +7410,7 @@
           <a:p>
             <a:fld id="{D8D49A41-4903-4E30-BEC5-3ED4B3E2B810}" type="datetimeFigureOut">
               <a:rPr lang="sv-SE" smtClean="0"/>
-              <a:t>2026-05-12</a:t>
+              <a:t>2026-09-11</a:t>
             </a:fld>
             <a:endParaRPr lang="sv-SE"/>
           </a:p>
@@ -7674,7 +7674,7 @@
           <a:p>
             <a:fld id="{D8D49A41-4903-4E30-BEC5-3ED4B3E2B810}" type="datetimeFigureOut">
               <a:rPr lang="sv-SE" smtClean="0"/>
-              <a:t>2026-05-12</a:t>
+              <a:t>2026-09-11</a:t>
             </a:fld>
             <a:endParaRPr lang="sv-SE"/>
           </a:p>
@@ -7887,7 +7887,7 @@
           <a:p>
             <a:fld id="{D8D49A41-4903-4E30-BEC5-3ED4B3E2B810}" type="datetimeFigureOut">
               <a:rPr lang="sv-SE" smtClean="0"/>
-              <a:t>2026-05-12</a:t>
+              <a:t>2026-09-11</a:t>
             </a:fld>
             <a:endParaRPr lang="sv-SE"/>
           </a:p>
@@ -8100,7 +8100,7 @@
           <a:p>
             <a:fld id="{D8D49A41-4903-4E30-BEC5-3ED4B3E2B810}" type="datetimeFigureOut">
               <a:rPr lang="sv-SE" smtClean="0"/>
-              <a:t>2026-05-12</a:t>
+              <a:t>2026-09-11</a:t>
             </a:fld>
             <a:endParaRPr lang="sv-SE"/>
           </a:p>
@@ -8337,7 +8337,7 @@
           <a:p>
             <a:fld id="{D8D49A41-4903-4E30-BEC5-3ED4B3E2B810}" type="datetimeFigureOut">
               <a:rPr lang="sv-SE" smtClean="0"/>
-              <a:t>2026-05-12</a:t>
+              <a:t>2026-09-11</a:t>
             </a:fld>
             <a:endParaRPr lang="sv-SE"/>
           </a:p>
@@ -8568,7 +8568,7 @@
           <a:p>
             <a:fld id="{D8D49A41-4903-4E30-BEC5-3ED4B3E2B810}" type="datetimeFigureOut">
               <a:rPr lang="sv-SE" smtClean="0"/>
-              <a:t>2026-05-12</a:t>
+              <a:t>2026-09-11</a:t>
             </a:fld>
             <a:endParaRPr lang="sv-SE"/>
           </a:p>
@@ -8681,7 +8681,7 @@
           <a:p>
             <a:fld id="{D8D49A41-4903-4E30-BEC5-3ED4B3E2B810}" type="datetimeFigureOut">
               <a:rPr lang="sv-SE" smtClean="0"/>
-              <a:t>2026-05-12</a:t>
+              <a:t>2026-09-11</a:t>
             </a:fld>
             <a:endParaRPr lang="sv-SE"/>
           </a:p>
@@ -8896,7 +8896,7 @@
           <a:p>
             <a:fld id="{D8D49A41-4903-4E30-BEC5-3ED4B3E2B810}" type="datetimeFigureOut">
               <a:rPr lang="sv-SE" smtClean="0"/>
-              <a:t>2026-05-12</a:t>
+              <a:t>2026-09-11</a:t>
             </a:fld>
             <a:endParaRPr lang="sv-SE"/>
           </a:p>
@@ -9207,7 +9207,7 @@
           <a:p>
             <a:fld id="{D8D49A41-4903-4E30-BEC5-3ED4B3E2B810}" type="datetimeFigureOut">
               <a:rPr lang="sv-SE" smtClean="0"/>
-              <a:t>2026-05-12</a:t>
+              <a:t>2026-09-11</a:t>
             </a:fld>
             <a:endParaRPr lang="sv-SE"/>
           </a:p>
@@ -9349,7 +9349,7 @@
           <a:p>
             <a:fld id="{D8D49A41-4903-4E30-BEC5-3ED4B3E2B810}" type="datetimeFigureOut">
               <a:rPr lang="sv-SE" smtClean="0"/>
-              <a:t>2026-05-12</a:t>
+              <a:t>2026-09-11</a:t>
             </a:fld>
             <a:endParaRPr lang="sv-SE"/>
           </a:p>
@@ -9478,7 +9478,7 @@
           <a:p>
             <a:fld id="{D8D49A41-4903-4E30-BEC5-3ED4B3E2B810}" type="datetimeFigureOut">
               <a:rPr lang="sv-SE" smtClean="0"/>
-              <a:t>2026-05-12</a:t>
+              <a:t>2026-09-11</a:t>
             </a:fld>
             <a:endParaRPr lang="sv-SE"/>
           </a:p>
@@ -9962,7 +9962,7 @@
             <a:fld id="{D8D49A41-4903-4E30-BEC5-3ED4B3E2B810}" type="datetimeFigureOut">
               <a:rPr lang="sv-SE" smtClean="0"/>
               <a:pPr/>
-              <a:t>2026-05-12</a:t>
+              <a:t>2026-09-11</a:t>
             </a:fld>
             <a:endParaRPr lang="sv-SE"/>
           </a:p>
@@ -10574,7 +10574,7 @@
             <a:fld id="{D8D49A41-4903-4E30-BEC5-3ED4B3E2B810}" type="datetimeFigureOut">
               <a:rPr lang="sv-SE" smtClean="0"/>
               <a:pPr/>
-              <a:t>2026-05-12</a:t>
+              <a:t>2026-09-11</a:t>
             </a:fld>
             <a:endParaRPr lang="sv-SE"/>
           </a:p>
@@ -11221,7 +11221,7 @@
             <a:fld id="{D8D49A41-4903-4E30-BEC5-3ED4B3E2B810}" type="datetimeFigureOut">
               <a:rPr lang="sv-SE" smtClean="0"/>
               <a:pPr/>
-              <a:t>2026-05-12</a:t>
+              <a:t>2026-09-11</a:t>
             </a:fld>
             <a:endParaRPr lang="sv-SE"/>
           </a:p>
@@ -11833,7 +11833,7 @@
             <a:fld id="{D8D49A41-4903-4E30-BEC5-3ED4B3E2B810}" type="datetimeFigureOut">
               <a:rPr lang="sv-SE" smtClean="0"/>
               <a:pPr/>
-              <a:t>2026-05-12</a:t>
+              <a:t>2026-09-11</a:t>
             </a:fld>
             <a:endParaRPr lang="sv-SE"/>
           </a:p>
@@ -12445,7 +12445,7 @@
             <a:fld id="{D8D49A41-4903-4E30-BEC5-3ED4B3E2B810}" type="datetimeFigureOut">
               <a:rPr lang="sv-SE" smtClean="0"/>
               <a:pPr/>
-              <a:t>2026-05-12</a:t>
+              <a:t>2026-09-11</a:t>
             </a:fld>
             <a:endParaRPr lang="sv-SE"/>
           </a:p>
@@ -16959,8 +16959,12 @@
               <a:t>run</a:t>
             </a:r>
             <a:r>
+              <a:rPr lang="sv-SE" sz="2000"/>
+              <a:t> -p </a:t>
+            </a:r>
+            <a:r>
               <a:rPr lang="sv-SE" sz="2000" dirty="0"/>
-              <a:t> –p 8080:8080 ghcr.io/</a:t>
+              <a:t>8080:8080 ghcr.io/</a:t>
             </a:r>
             <a:r>
               <a:rPr lang="sv-SE" sz="2000" dirty="0" err="1"/>
@@ -17010,12 +17014,8 @@
               <a:t>adm</a:t>
             </a:r>
             <a:r>
-              <a:rPr lang="sv-SE" sz="2000"/>
-              <a:t>/ </a:t>
-            </a:r>
-            <a:r>
               <a:rPr lang="sv-SE" sz="2000" dirty="0"/>
-              <a:t>till adressen i webbläsaren och ladda om sidan.</a:t>
+              <a:t>/ till adressen i webbläsaren och ladda om sidan.</a:t>
             </a:r>
           </a:p>
           <a:p>
@@ -23173,6 +23173,15 @@
 </file>
 
 <file path=customXml/item1.xml><?xml version="1.0" encoding="utf-8"?>
+<?mso-contentType ?>
+<FormTemplates xmlns="http://schemas.microsoft.com/sharepoint/v3/contenttype/forms">
+  <Display>DocumentLibraryForm</Display>
+  <Edit>DocumentLibraryForm</Edit>
+  <New>DocumentLibraryForm</New>
+</FormTemplates>
+</file>
+
+<file path=customXml/item2.xml><?xml version="1.0" encoding="utf-8"?>
 <ct:contentTypeSchema xmlns:ct="http://schemas.microsoft.com/office/2006/metadata/contentType" xmlns:ma="http://schemas.microsoft.com/office/2006/metadata/properties/metaAttributes" ct:_="" ma:_="" ma:contentTypeName="dokument" ma:contentTypeID="0x010100BF93C0C5EE7F83438D3374EF6FC6CFE8" ma:contentTypeVersion="6" ma:contentTypeDescription="Skapa ett nytt dokument." ma:contentTypeScope="" ma:versionID="47a8963a7c37e56dddba9289e5978949">
   <xsd:schema xmlns:xsd="http://www.w3.org/2001/XMLSchema" xmlns:xs="http://www.w3.org/2001/XMLSchema" xmlns:p="http://schemas.microsoft.com/office/2006/metadata/properties" xmlns:ns2="630a2048-6a54-4210-bba6-95b147291d33" xmlns:ns3="43cfa058-710b-45d5-80d9-51034d8b2dca" targetNamespace="http://schemas.microsoft.com/office/2006/metadata/properties" ma:root="true" ma:fieldsID="3eb248da3570b7edd177235fee2ed6f5" ns2:_="" ns3:_="">
     <xsd:import namespace="630a2048-6a54-4210-bba6-95b147291d33"/>
@@ -23349,15 +23358,6 @@
 </ct:contentTypeSchema>
 </file>
 
-<file path=customXml/item2.xml><?xml version="1.0" encoding="utf-8"?>
-<?mso-contentType ?>
-<FormTemplates xmlns="http://schemas.microsoft.com/sharepoint/v3/contenttype/forms">
-  <Display>DocumentLibraryForm</Display>
-  <Edit>DocumentLibraryForm</Edit>
-  <New>DocumentLibraryForm</New>
-</FormTemplates>
-</file>
-
 <file path=customXml/item3.xml><?xml version="1.0" encoding="utf-8"?>
 <p:properties xmlns:p="http://schemas.microsoft.com/office/2006/metadata/properties" xmlns:xsi="http://www.w3.org/2001/XMLSchema-instance" xmlns:pc="http://schemas.microsoft.com/office/infopath/2007/PartnerControls">
   <documentManagement/>
@@ -23365,6 +23365,14 @@
 </file>
 
 <file path=customXml/itemProps1.xml><?xml version="1.0" encoding="utf-8"?>
+<ds:datastoreItem xmlns:ds="http://schemas.openxmlformats.org/officeDocument/2006/customXml" ds:itemID="{58E68E51-B06E-4E0F-ABEE-C754E002158D}">
+  <ds:schemaRefs>
+    <ds:schemaRef ds:uri="http://schemas.microsoft.com/sharepoint/v3/contenttype/forms"/>
+  </ds:schemaRefs>
+</ds:datastoreItem>
+</file>
+
+<file path=customXml/itemProps2.xml><?xml version="1.0" encoding="utf-8"?>
 <ds:datastoreItem xmlns:ds="http://schemas.openxmlformats.org/officeDocument/2006/customXml" ds:itemID="{A27087E6-7CF9-4CCE-84CA-97F5AB54E191}">
   <ds:schemaRefs>
     <ds:schemaRef ds:uri="http://schemas.microsoft.com/office/2006/metadata/contentType"/>
@@ -23383,14 +23391,6 @@
 </ds:datastoreItem>
 </file>
 
-<file path=customXml/itemProps2.xml><?xml version="1.0" encoding="utf-8"?>
-<ds:datastoreItem xmlns:ds="http://schemas.openxmlformats.org/officeDocument/2006/customXml" ds:itemID="{58E68E51-B06E-4E0F-ABEE-C754E002158D}">
-  <ds:schemaRefs>
-    <ds:schemaRef ds:uri="http://schemas.microsoft.com/sharepoint/v3/contenttype/forms"/>
-  </ds:schemaRefs>
-</ds:datastoreItem>
-</file>
-
 <file path=customXml/itemProps3.xml><?xml version="1.0" encoding="utf-8"?>
 <ds:datastoreItem xmlns:ds="http://schemas.openxmlformats.org/officeDocument/2006/customXml" ds:itemID="{983C3FF3-C4B2-4E0C-A8BA-FDE126DD742C}">
   <ds:schemaRefs>
